--- a/data-eng/decks/w4d1s1.pptx
+++ b/data-eng/decks/w4d1s1.pptx
@@ -3099,7 +3099,7 @@
       <p:grpSpPr/>
       <p:sp>
         <p:nvSpPr>
-          <p:cNvPr id="2" name="Oval 1"/>
+          <p:cNvPr id="2" name="deckgen:decor"/>
           <p:cNvSpPr/>
           <p:nvPr/>
         </p:nvSpPr>
@@ -3129,7 +3129,7 @@
       </p:sp>
       <p:sp>
         <p:nvSpPr>
-          <p:cNvPr id="3" name="Oval 2"/>
+          <p:cNvPr id="3" name="deckgen:decor"/>
           <p:cNvSpPr/>
           <p:nvPr/>
         </p:nvSpPr>
@@ -3159,7 +3159,7 @@
       </p:sp>
       <p:sp>
         <p:nvSpPr>
-          <p:cNvPr id="4" name="Oval 3"/>
+          <p:cNvPr id="4" name="deckgen:decor"/>
           <p:cNvSpPr/>
           <p:nvPr/>
         </p:nvSpPr>
@@ -3189,7 +3189,7 @@
       </p:sp>
       <p:sp>
         <p:nvSpPr>
-          <p:cNvPr id="5" name="Rectangle 4"/>
+          <p:cNvPr id="5" name="deckgen:decor"/>
           <p:cNvSpPr/>
           <p:nvPr/>
         </p:nvSpPr>
@@ -3219,7 +3219,7 @@
       </p:sp>
       <p:sp>
         <p:nvSpPr>
-          <p:cNvPr id="6" name="Oval 5"/>
+          <p:cNvPr id="6" name="deckgen:decor"/>
           <p:cNvSpPr/>
           <p:nvPr/>
         </p:nvSpPr>
@@ -3249,7 +3249,7 @@
       </p:sp>
       <p:sp>
         <p:nvSpPr>
-          <p:cNvPr id="7" name="Oval 6"/>
+          <p:cNvPr id="7" name="deckgen:decor"/>
           <p:cNvSpPr/>
           <p:nvPr/>
         </p:nvSpPr>
@@ -3279,7 +3279,7 @@
       </p:sp>
       <p:sp>
         <p:nvSpPr>
-          <p:cNvPr id="8" name="Oval 7"/>
+          <p:cNvPr id="8" name="deckgen:decor"/>
           <p:cNvSpPr/>
           <p:nvPr/>
         </p:nvSpPr>
@@ -3309,7 +3309,7 @@
       </p:sp>
       <p:sp>
         <p:nvSpPr>
-          <p:cNvPr id="9" name="Oval 8"/>
+          <p:cNvPr id="9" name="deckgen:decor"/>
           <p:cNvSpPr/>
           <p:nvPr/>
         </p:nvSpPr>
@@ -3339,7 +3339,7 @@
       </p:sp>
       <p:sp>
         <p:nvSpPr>
-          <p:cNvPr id="10" name="Rectangle 9"/>
+          <p:cNvPr id="10" name="deckgen:decor"/>
           <p:cNvSpPr/>
           <p:nvPr/>
         </p:nvSpPr>
@@ -3599,7 +3599,7 @@
       <p:grpSpPr/>
       <p:sp>
         <p:nvSpPr>
-          <p:cNvPr id="2" name="Oval 1"/>
+          <p:cNvPr id="2" name="deckgen:decor"/>
           <p:cNvSpPr/>
           <p:nvPr/>
         </p:nvSpPr>
@@ -3629,7 +3629,7 @@
       </p:sp>
       <p:sp>
         <p:nvSpPr>
-          <p:cNvPr id="3" name="Oval 2"/>
+          <p:cNvPr id="3" name="deckgen:decor"/>
           <p:cNvSpPr/>
           <p:nvPr/>
         </p:nvSpPr>
@@ -3921,7 +3921,7 @@
                 <a:ea typeface="Pretendard"/>
                 <a:cs typeface="Pretendard"/>
               </a:rPr>
-              <a:t>docker-compose.yml 에 minio·mc 두 서비스</a:t>
+              <a:t>히어독으로 compose 파일 — minio·mc</a:t>
             </a:r>
           </a:p>
         </p:txBody>
@@ -4037,7 +4037,7 @@
                 <a:ea typeface="Pretendard"/>
                 <a:cs typeface="Pretendard"/>
               </a:rPr>
-              <a:t>http://localhost:9001 콘솔 로그인</a:t>
+              <a:t>http://localhost:9001 SILO 콘솔 로그인</a:t>
             </a:r>
           </a:p>
         </p:txBody>
@@ -4381,7 +4381,7 @@
                 <a:ea typeface="Pretendard"/>
                 <a:cs typeface="Pretendard"/>
               </a:rPr>
-              <a:t>도커 실행 · 9000·9001 포트 비우기</a:t>
+              <a:t>Docker 켜짐 · 이미지 두 개</a:t>
             </a:r>
           </a:p>
         </p:txBody>
@@ -4406,7 +4406,7 @@
       <p:grpSpPr/>
       <p:sp>
         <p:nvSpPr>
-          <p:cNvPr id="2" name="Oval 1"/>
+          <p:cNvPr id="2" name="deckgen:decor"/>
           <p:cNvSpPr/>
           <p:nvPr/>
         </p:nvSpPr>
@@ -4436,7 +4436,7 @@
       </p:sp>
       <p:sp>
         <p:nvSpPr>
-          <p:cNvPr id="3" name="Oval 2"/>
+          <p:cNvPr id="3" name="deckgen:decor"/>
           <p:cNvSpPr/>
           <p:nvPr/>
         </p:nvSpPr>
@@ -4466,7 +4466,7 @@
       </p:sp>
       <p:sp>
         <p:nvSpPr>
-          <p:cNvPr id="4" name="Oval 3"/>
+          <p:cNvPr id="4" name="deckgen:decor"/>
           <p:cNvSpPr/>
           <p:nvPr/>
         </p:nvSpPr>
@@ -5397,7 +5397,7 @@
       <p:grpSpPr/>
       <p:sp>
         <p:nvSpPr>
-          <p:cNvPr id="2" name="Oval 1"/>
+          <p:cNvPr id="2" name="deckgen:decor"/>
           <p:cNvSpPr/>
           <p:nvPr/>
         </p:nvSpPr>
@@ -5427,7 +5427,7 @@
       </p:sp>
       <p:sp>
         <p:nvSpPr>
-          <p:cNvPr id="3" name="Oval 2"/>
+          <p:cNvPr id="3" name="deckgen:decor"/>
           <p:cNvSpPr/>
           <p:nvPr/>
         </p:nvSpPr>
@@ -5457,7 +5457,7 @@
       </p:sp>
       <p:sp>
         <p:nvSpPr>
-          <p:cNvPr id="4" name="Oval 3"/>
+          <p:cNvPr id="4" name="deckgen:decor"/>
           <p:cNvSpPr/>
           <p:nvPr/>
         </p:nvSpPr>
@@ -6424,7 +6424,7 @@
       <p:grpSpPr/>
       <p:sp>
         <p:nvSpPr>
-          <p:cNvPr id="2" name="Oval 1"/>
+          <p:cNvPr id="2" name="deckgen:decor"/>
           <p:cNvSpPr/>
           <p:nvPr/>
         </p:nvSpPr>
@@ -6454,7 +6454,7 @@
       </p:sp>
       <p:sp>
         <p:nvSpPr>
-          <p:cNvPr id="3" name="Oval 2"/>
+          <p:cNvPr id="3" name="deckgen:decor"/>
           <p:cNvSpPr/>
           <p:nvPr/>
         </p:nvSpPr>
@@ -6484,7 +6484,7 @@
       </p:sp>
       <p:sp>
         <p:nvSpPr>
-          <p:cNvPr id="4" name="Oval 3"/>
+          <p:cNvPr id="4" name="deckgen:decor"/>
           <p:cNvSpPr/>
           <p:nvPr/>
         </p:nvSpPr>
@@ -8881,7 +8881,7 @@
       <p:grpSpPr/>
       <p:sp>
         <p:nvSpPr>
-          <p:cNvPr id="2" name="Oval 1"/>
+          <p:cNvPr id="2" name="deckgen:decor"/>
           <p:cNvSpPr/>
           <p:nvPr/>
         </p:nvSpPr>
@@ -8911,7 +8911,7 @@
       </p:sp>
       <p:sp>
         <p:nvSpPr>
-          <p:cNvPr id="3" name="Oval 2"/>
+          <p:cNvPr id="3" name="deckgen:decor"/>
           <p:cNvSpPr/>
           <p:nvPr/>
         </p:nvSpPr>
@@ -8941,7 +8941,7 @@
       </p:sp>
       <p:sp>
         <p:nvSpPr>
-          <p:cNvPr id="4" name="Oval 3"/>
+          <p:cNvPr id="4" name="deckgen:decor"/>
           <p:cNvSpPr/>
           <p:nvPr/>
         </p:nvSpPr>
@@ -9273,7 +9273,7 @@
                 <a:ea typeface="Pretendard"/>
                 <a:cs typeface="Pretendard"/>
               </a:rPr>
-              <a:t>오브젝트를 담는 최상위 컨테이너 — 이름은 전역에서 고유, 만든 뒤엔 바꿀 수 없다</a:t>
+              <a:t>최상위 그릇 — AWS S3 는 전 세계 · MinIO 는 그 서버 안에서 고유, 이름 변경 불가</a:t>
             </a:r>
           </a:p>
         </p:txBody>
@@ -10072,7 +10072,7 @@
       <p:grpSpPr/>
       <p:sp>
         <p:nvSpPr>
-          <p:cNvPr id="2" name="Oval 1"/>
+          <p:cNvPr id="2" name="deckgen:decor"/>
           <p:cNvSpPr/>
           <p:nvPr/>
         </p:nvSpPr>
@@ -10102,7 +10102,7 @@
       </p:sp>
       <p:sp>
         <p:nvSpPr>
-          <p:cNvPr id="3" name="Oval 2"/>
+          <p:cNvPr id="3" name="deckgen:decor"/>
           <p:cNvSpPr/>
           <p:nvPr/>
         </p:nvSpPr>
@@ -10132,7 +10132,7 @@
       </p:sp>
       <p:sp>
         <p:nvSpPr>
-          <p:cNvPr id="4" name="Oval 3"/>
+          <p:cNvPr id="4" name="deckgen:decor"/>
           <p:cNvSpPr/>
           <p:nvPr/>
         </p:nvSpPr>
@@ -11133,7 +11133,7 @@
       <p:grpSpPr/>
       <p:sp>
         <p:nvSpPr>
-          <p:cNvPr id="2" name="Oval 1"/>
+          <p:cNvPr id="2" name="deckgen:decor"/>
           <p:cNvSpPr/>
           <p:nvPr/>
         </p:nvSpPr>
@@ -11163,7 +11163,7 @@
       </p:sp>
       <p:sp>
         <p:nvSpPr>
-          <p:cNvPr id="3" name="Oval 2"/>
+          <p:cNvPr id="3" name="deckgen:decor"/>
           <p:cNvSpPr/>
           <p:nvPr/>
         </p:nvSpPr>
@@ -11193,7 +11193,7 @@
       </p:sp>
       <p:sp>
         <p:nvSpPr>
-          <p:cNvPr id="4" name="Oval 3"/>
+          <p:cNvPr id="4" name="deckgen:decor"/>
           <p:cNvSpPr/>
           <p:nvPr/>
         </p:nvSpPr>
@@ -12347,7 +12347,7 @@
       <p:grpSpPr/>
       <p:sp>
         <p:nvSpPr>
-          <p:cNvPr id="2" name="Oval 1"/>
+          <p:cNvPr id="2" name="deckgen:decor"/>
           <p:cNvSpPr/>
           <p:nvPr/>
         </p:nvSpPr>
@@ -12377,7 +12377,7 @@
       </p:sp>
       <p:sp>
         <p:nvSpPr>
-          <p:cNvPr id="3" name="Oval 2"/>
+          <p:cNvPr id="3" name="deckgen:decor"/>
           <p:cNvSpPr/>
           <p:nvPr/>
         </p:nvSpPr>
@@ -12407,7 +12407,7 @@
       </p:sp>
       <p:sp>
         <p:nvSpPr>
-          <p:cNvPr id="4" name="Oval 3"/>
+          <p:cNvPr id="4" name="deckgen:decor"/>
           <p:cNvSpPr/>
           <p:nvPr/>
         </p:nvSpPr>
@@ -13880,7 +13880,25 @@
                 <a:ea typeface="Pretendard"/>
                 <a:cs typeface="Pretendard"/>
               </a:rPr>
-              <a:t>4-5</a:t>
+              <a:t>4-2 에 붙이고</a:t>
+            </a:r>
+          </a:p>
+          <a:p>
+            <a:pPr algn="ctr">
+              <a:lnSpc>
+                <a:spcPct val="115000"/>
+              </a:lnSpc>
+            </a:pPr>
+            <a:r>
+              <a:rPr sz="1875" b="0">
+                <a:solidFill>
+                  <a:srgbClr val="3D3D3D"/>
+                </a:solidFill>
+                <a:latin typeface="Pretendard"/>
+                <a:ea typeface="Pretendard"/>
+                <a:cs typeface="Pretendard"/>
+              </a:rPr>
+              <a:t>4-5 에서 자세히</a:t>
             </a:r>
           </a:p>
         </p:txBody>
@@ -13921,7 +13939,7 @@
                 <a:ea typeface="Pretendard"/>
                 <a:cs typeface="Pretendard"/>
               </a:rPr>
-              <a:t>매일 한 층씩 올려 금요일에 전체가 이어진다 — 하루라도 빠지면 다음이 막히니 결석 시 반드시 따라잡기</a:t>
+              <a:t>매일 한 층씩 올려 4-5(10-22 목)에 전체가 이어진다 — 하루라도 빠지면 다음이 막히니 결석 시 반드시 따라잡기</a:t>
             </a:r>
           </a:p>
         </p:txBody>
@@ -14058,7 +14076,7 @@
       <p:grpSpPr/>
       <p:sp>
         <p:nvSpPr>
-          <p:cNvPr id="2" name="Oval 1"/>
+          <p:cNvPr id="2" name="deckgen:decor"/>
           <p:cNvSpPr/>
           <p:nvPr/>
         </p:nvSpPr>
@@ -14088,7 +14106,7 @@
       </p:sp>
       <p:sp>
         <p:nvSpPr>
-          <p:cNvPr id="3" name="Oval 2"/>
+          <p:cNvPr id="3" name="deckgen:decor"/>
           <p:cNvSpPr/>
           <p:nvPr/>
         </p:nvSpPr>
@@ -14118,7 +14136,7 @@
       </p:sp>
       <p:sp>
         <p:nvSpPr>
-          <p:cNvPr id="4" name="Oval 3"/>
+          <p:cNvPr id="4" name="deckgen:decor"/>
           <p:cNvSpPr/>
           <p:nvPr/>
         </p:nvSpPr>
